--- a/Materjalid/Day8 SQL/8-paev-andmetarkus-esitlus.pptx
+++ b/Materjalid/Day8 SQL/8-paev-andmetarkus-esitlus.pptx
@@ -1760,7 +1760,7 @@
           <a:p>
             <a:fld id="{B3F28435-DCAB-49E5-8B98-BBB31E071E6A}" type="datetimeFigureOut">
               <a:rPr lang="en-GB" smtClean="0"/>
-              <a:t>06/09/2026</a:t>
+              <a:t>07/09/2026</a:t>
             </a:fld>
             <a:endParaRPr lang="en-GB"/>
           </a:p>
@@ -2767,7 +2767,7 @@
           <a:p>
             <a:fld id="{5BCAD085-E8A6-8845-BD4E-CB4CCA059FC4}" type="datetimeFigureOut">
               <a:rPr lang="en-US" smtClean="0"/>
-              <a:t>9/6/2026</a:t>
+              <a:t>9/7/2026</a:t>
             </a:fld>
             <a:endParaRPr lang="en-US"/>
           </a:p>
@@ -2935,7 +2935,7 @@
           <a:p>
             <a:fld id="{5BCAD085-E8A6-8845-BD4E-CB4CCA059FC4}" type="datetimeFigureOut">
               <a:rPr lang="en-US" smtClean="0"/>
-              <a:t>9/6/2026</a:t>
+              <a:t>9/7/2026</a:t>
             </a:fld>
             <a:endParaRPr lang="en-US"/>
           </a:p>
@@ -3113,7 +3113,7 @@
           <a:p>
             <a:fld id="{5BCAD085-E8A6-8845-BD4E-CB4CCA059FC4}" type="datetimeFigureOut">
               <a:rPr lang="en-US" smtClean="0"/>
-              <a:t>9/6/2026</a:t>
+              <a:t>9/7/2026</a:t>
             </a:fld>
             <a:endParaRPr lang="en-US"/>
           </a:p>
@@ -3281,7 +3281,7 @@
           <a:p>
             <a:fld id="{5BCAD085-E8A6-8845-BD4E-CB4CCA059FC4}" type="datetimeFigureOut">
               <a:rPr lang="en-US" smtClean="0"/>
-              <a:t>9/6/2026</a:t>
+              <a:t>9/7/2026</a:t>
             </a:fld>
             <a:endParaRPr lang="en-US"/>
           </a:p>
@@ -3526,7 +3526,7 @@
           <a:p>
             <a:fld id="{5BCAD085-E8A6-8845-BD4E-CB4CCA059FC4}" type="datetimeFigureOut">
               <a:rPr lang="en-US" smtClean="0"/>
-              <a:t>9/6/2026</a:t>
+              <a:t>9/7/2026</a:t>
             </a:fld>
             <a:endParaRPr lang="en-US"/>
           </a:p>
@@ -3811,7 +3811,7 @@
           <a:p>
             <a:fld id="{5BCAD085-E8A6-8845-BD4E-CB4CCA059FC4}" type="datetimeFigureOut">
               <a:rPr lang="en-US" smtClean="0"/>
-              <a:t>9/6/2026</a:t>
+              <a:t>9/7/2026</a:t>
             </a:fld>
             <a:endParaRPr lang="en-US"/>
           </a:p>
@@ -4230,7 +4230,7 @@
           <a:p>
             <a:fld id="{5BCAD085-E8A6-8845-BD4E-CB4CCA059FC4}" type="datetimeFigureOut">
               <a:rPr lang="en-US" smtClean="0"/>
-              <a:t>9/6/2026</a:t>
+              <a:t>9/7/2026</a:t>
             </a:fld>
             <a:endParaRPr lang="en-US"/>
           </a:p>
@@ -4347,7 +4347,7 @@
           <a:p>
             <a:fld id="{5BCAD085-E8A6-8845-BD4E-CB4CCA059FC4}" type="datetimeFigureOut">
               <a:rPr lang="en-US" smtClean="0"/>
-              <a:t>9/6/2026</a:t>
+              <a:t>9/7/2026</a:t>
             </a:fld>
             <a:endParaRPr lang="en-US"/>
           </a:p>
@@ -4442,7 +4442,7 @@
           <a:p>
             <a:fld id="{5BCAD085-E8A6-8845-BD4E-CB4CCA059FC4}" type="datetimeFigureOut">
               <a:rPr lang="en-US" smtClean="0"/>
-              <a:t>9/6/2026</a:t>
+              <a:t>9/7/2026</a:t>
             </a:fld>
             <a:endParaRPr lang="en-US"/>
           </a:p>
@@ -4717,7 +4717,7 @@
           <a:p>
             <a:fld id="{5BCAD085-E8A6-8845-BD4E-CB4CCA059FC4}" type="datetimeFigureOut">
               <a:rPr lang="en-US" smtClean="0"/>
-              <a:t>9/6/2026</a:t>
+              <a:t>9/7/2026</a:t>
             </a:fld>
             <a:endParaRPr lang="en-US"/>
           </a:p>
@@ -4969,7 +4969,7 @@
           <a:p>
             <a:fld id="{5BCAD085-E8A6-8845-BD4E-CB4CCA059FC4}" type="datetimeFigureOut">
               <a:rPr lang="en-US" smtClean="0"/>
-              <a:t>9/6/2026</a:t>
+              <a:t>9/7/2026</a:t>
             </a:fld>
             <a:endParaRPr lang="en-US"/>
           </a:p>
@@ -5180,7 +5180,7 @@
           <a:p>
             <a:fld id="{5BCAD085-E8A6-8845-BD4E-CB4CCA059FC4}" type="datetimeFigureOut">
               <a:rPr lang="en-US" smtClean="0"/>
-              <a:t>9/6/2026</a:t>
+              <a:t>9/7/2026</a:t>
             </a:fld>
             <a:endParaRPr lang="en-US"/>
           </a:p>
@@ -8029,14 +8029,83 @@
               </a:spcAft>
             </a:pPr>
             <a:r>
-              <a:rPr sz="1200" b="0">
-                <a:solidFill>
-                  <a:srgbClr val="E2E8F0"/>
-                </a:solidFill>
-                <a:latin typeface="Consolas"/>
-              </a:rPr>
-              <a:t>SELECT t.tellimus_id, t.kuupäev, t.makseviis, k.nimi</a:t>
-            </a:r>
+              <a:rPr sz="1200" b="0" dirty="0">
+                <a:solidFill>
+                  <a:srgbClr val="E2E8F0"/>
+                </a:solidFill>
+                <a:latin typeface="Consolas"/>
+              </a:rPr>
+              <a:t>SELECT </a:t>
+            </a:r>
+            <a:r>
+              <a:rPr sz="1200" b="0" dirty="0" err="1">
+                <a:solidFill>
+                  <a:srgbClr val="E2E8F0"/>
+                </a:solidFill>
+                <a:latin typeface="Consolas"/>
+              </a:rPr>
+              <a:t>t.tellimus_id</a:t>
+            </a:r>
+            <a:r>
+              <a:rPr sz="1200" b="0" dirty="0">
+                <a:solidFill>
+                  <a:srgbClr val="E2E8F0"/>
+                </a:solidFill>
+                <a:latin typeface="Consolas"/>
+              </a:rPr>
+              <a:t>, </a:t>
+            </a:r>
+            <a:r>
+              <a:rPr sz="1200" b="0" dirty="0" err="1">
+                <a:solidFill>
+                  <a:srgbClr val="E2E8F0"/>
+                </a:solidFill>
+                <a:latin typeface="Consolas"/>
+              </a:rPr>
+              <a:t>t.kuupäev</a:t>
+            </a:r>
+            <a:r>
+              <a:rPr sz="1200" b="0" dirty="0">
+                <a:solidFill>
+                  <a:srgbClr val="E2E8F0"/>
+                </a:solidFill>
+                <a:latin typeface="Consolas"/>
+              </a:rPr>
+              <a:t>, </a:t>
+            </a:r>
+            <a:r>
+              <a:rPr sz="1200" b="0" dirty="0" err="1">
+                <a:solidFill>
+                  <a:srgbClr val="E2E8F0"/>
+                </a:solidFill>
+                <a:latin typeface="Consolas"/>
+              </a:rPr>
+              <a:t>t.makseviis</a:t>
+            </a:r>
+            <a:r>
+              <a:rPr sz="1200" b="0" dirty="0">
+                <a:solidFill>
+                  <a:srgbClr val="E2E8F0"/>
+                </a:solidFill>
+                <a:latin typeface="Consolas"/>
+              </a:rPr>
+              <a:t>, </a:t>
+            </a:r>
+            <a:r>
+              <a:rPr sz="1200" b="0" dirty="0" err="1">
+                <a:solidFill>
+                  <a:srgbClr val="E2E8F0"/>
+                </a:solidFill>
+                <a:latin typeface="Consolas"/>
+              </a:rPr>
+              <a:t>k.nimi</a:t>
+            </a:r>
+            <a:endParaRPr sz="1200" b="0" dirty="0">
+              <a:solidFill>
+                <a:srgbClr val="E2E8F0"/>
+              </a:solidFill>
+              <a:latin typeface="Consolas"/>
+            </a:endParaRPr>
           </a:p>
           <a:p>
             <a:pPr>
@@ -8045,13 +8114,31 @@
               </a:spcAft>
             </a:pPr>
             <a:r>
-              <a:rPr sz="1200" b="0">
-                <a:solidFill>
-                  <a:srgbClr val="E2E8F0"/>
-                </a:solidFill>
-                <a:latin typeface="Consolas"/>
-              </a:rPr>
-              <a:t>FROM tellimused t</a:t>
+              <a:rPr sz="1200" b="0" dirty="0">
+                <a:solidFill>
+                  <a:srgbClr val="E2E8F0"/>
+                </a:solidFill>
+                <a:latin typeface="Consolas"/>
+              </a:rPr>
+              <a:t>FROM </a:t>
+            </a:r>
+            <a:r>
+              <a:rPr sz="1200" b="0" dirty="0" err="1">
+                <a:solidFill>
+                  <a:srgbClr val="E2E8F0"/>
+                </a:solidFill>
+                <a:latin typeface="Consolas"/>
+              </a:rPr>
+              <a:t>tellimused</a:t>
+            </a:r>
+            <a:r>
+              <a:rPr sz="1200" b="0" dirty="0">
+                <a:solidFill>
+                  <a:srgbClr val="E2E8F0"/>
+                </a:solidFill>
+                <a:latin typeface="Consolas"/>
+              </a:rPr>
+              <a:t> t</a:t>
             </a:r>
           </a:p>
           <a:p>
@@ -8061,14 +8148,65 @@
               </a:spcAft>
             </a:pPr>
             <a:r>
-              <a:rPr sz="1200" b="0">
-                <a:solidFill>
-                  <a:srgbClr val="E2E8F0"/>
-                </a:solidFill>
-                <a:latin typeface="Consolas"/>
-              </a:rPr>
-              <a:t>INNER JOIN kliendid k ON t.klient_id = k.klient_id</a:t>
-            </a:r>
+              <a:rPr sz="1200" b="0" dirty="0">
+                <a:solidFill>
+                  <a:srgbClr val="E2E8F0"/>
+                </a:solidFill>
+                <a:latin typeface="Consolas"/>
+              </a:rPr>
+              <a:t>INNER JOIN </a:t>
+            </a:r>
+            <a:r>
+              <a:rPr sz="1200" b="0" dirty="0" err="1">
+                <a:solidFill>
+                  <a:srgbClr val="E2E8F0"/>
+                </a:solidFill>
+                <a:latin typeface="Consolas"/>
+              </a:rPr>
+              <a:t>kliendid</a:t>
+            </a:r>
+            <a:r>
+              <a:rPr sz="1200" b="0" dirty="0">
+                <a:solidFill>
+                  <a:srgbClr val="E2E8F0"/>
+                </a:solidFill>
+                <a:latin typeface="Consolas"/>
+              </a:rPr>
+              <a:t> k ON </a:t>
+            </a:r>
+            <a:r>
+              <a:rPr sz="1200" b="0" dirty="0" err="1">
+                <a:solidFill>
+                  <a:srgbClr val="E2E8F0"/>
+                </a:solidFill>
+                <a:latin typeface="Consolas"/>
+              </a:rPr>
+              <a:t>t.klient_id</a:t>
+            </a:r>
+            <a:r>
+              <a:rPr sz="1200" b="0" dirty="0">
+                <a:solidFill>
+                  <a:srgbClr val="E2E8F0"/>
+                </a:solidFill>
+                <a:latin typeface="Consolas"/>
+              </a:rPr>
+              <a:t> = </a:t>
+            </a:r>
+            <a:r>
+              <a:rPr sz="1200" b="0" dirty="0" err="1">
+                <a:solidFill>
+                  <a:srgbClr val="E2E8F0"/>
+                </a:solidFill>
+                <a:latin typeface="Consolas"/>
+              </a:rPr>
+              <a:t>k.klient_id</a:t>
+            </a:r>
+            <a:endParaRPr sz="1200" b="0" dirty="0">
+              <a:solidFill>
+                <a:srgbClr val="E2E8F0"/>
+              </a:solidFill>
+              <a:latin typeface="Consolas"/>
+            </a:endParaRPr>
           </a:p>
           <a:p>
             <a:pPr>
@@ -8077,13 +8215,49 @@
               </a:spcAft>
             </a:pPr>
             <a:r>
-              <a:rPr sz="1200" b="0">
-                <a:solidFill>
-                  <a:srgbClr val="E2E8F0"/>
-                </a:solidFill>
-                <a:latin typeface="Consolas"/>
-              </a:rPr>
-              <a:t>WHERE t.staatus = 'Täidetud'</a:t>
+              <a:rPr sz="1200" b="0" dirty="0">
+                <a:solidFill>
+                  <a:srgbClr val="E2E8F0"/>
+                </a:solidFill>
+                <a:latin typeface="Consolas"/>
+              </a:rPr>
+              <a:t>WHERE </a:t>
+            </a:r>
+            <a:r>
+              <a:rPr sz="1200" b="0" dirty="0" err="1">
+                <a:solidFill>
+                  <a:srgbClr val="E2E8F0"/>
+                </a:solidFill>
+                <a:latin typeface="Consolas"/>
+              </a:rPr>
+              <a:t>t.staatus</a:t>
+            </a:r>
+            <a:r>
+              <a:rPr sz="1200" b="0" dirty="0">
+                <a:solidFill>
+                  <a:srgbClr val="E2E8F0"/>
+                </a:solidFill>
+                <a:latin typeface="Consolas"/>
+              </a:rPr>
+              <a:t> = '</a:t>
+            </a:r>
+            <a:r>
+              <a:rPr sz="1200" b="0" dirty="0" err="1">
+                <a:solidFill>
+                  <a:srgbClr val="E2E8F0"/>
+                </a:solidFill>
+                <a:latin typeface="Consolas"/>
+              </a:rPr>
+              <a:t>Täidetud</a:t>
+            </a:r>
+            <a:r>
+              <a:rPr sz="1200" b="0" dirty="0">
+                <a:solidFill>
+                  <a:srgbClr val="E2E8F0"/>
+                </a:solidFill>
+                <a:latin typeface="Consolas"/>
+              </a:rPr>
+              <a:t>'</a:t>
             </a:r>
           </a:p>
           <a:p>
@@ -8093,13 +8267,31 @@
               </a:spcAft>
             </a:pPr>
             <a:r>
-              <a:rPr sz="1200" b="0">
-                <a:solidFill>
-                  <a:srgbClr val="E2E8F0"/>
-                </a:solidFill>
-                <a:latin typeface="Consolas"/>
-              </a:rPr>
-              <a:t>ORDER BY t.kuupäev DESC;</a:t>
+              <a:rPr sz="1200" b="0" dirty="0">
+                <a:solidFill>
+                  <a:srgbClr val="E2E8F0"/>
+                </a:solidFill>
+                <a:latin typeface="Consolas"/>
+              </a:rPr>
+              <a:t>ORDER BY </a:t>
+            </a:r>
+            <a:r>
+              <a:rPr sz="1200" b="0" dirty="0" err="1">
+                <a:solidFill>
+                  <a:srgbClr val="E2E8F0"/>
+                </a:solidFill>
+                <a:latin typeface="Consolas"/>
+              </a:rPr>
+              <a:t>t.kuupäev</a:t>
+            </a:r>
+            <a:r>
+              <a:rPr sz="1200" b="0" dirty="0">
+                <a:solidFill>
+                  <a:srgbClr val="E2E8F0"/>
+                </a:solidFill>
+                <a:latin typeface="Consolas"/>
+              </a:rPr>
+              <a:t> DESC;</a:t>
             </a:r>
           </a:p>
         </p:txBody>
@@ -15032,13 +15224,31 @@
               </a:spcAft>
             </a:pPr>
             <a:r>
-              <a:rPr sz="1300" b="0">
-                <a:solidFill>
-                  <a:srgbClr val="E2E8F0"/>
-                </a:solidFill>
-                <a:latin typeface="Consolas"/>
-              </a:rPr>
-              <a:t>SELECT k.nimi,</a:t>
+              <a:rPr sz="1300" b="0" dirty="0">
+                <a:solidFill>
+                  <a:srgbClr val="E2E8F0"/>
+                </a:solidFill>
+                <a:latin typeface="Consolas"/>
+              </a:rPr>
+              <a:t>SELECT </a:t>
+            </a:r>
+            <a:r>
+              <a:rPr sz="1300" b="0" dirty="0" err="1">
+                <a:solidFill>
+                  <a:srgbClr val="E2E8F0"/>
+                </a:solidFill>
+                <a:latin typeface="Consolas"/>
+              </a:rPr>
+              <a:t>k.nimi</a:t>
+            </a:r>
+            <a:r>
+              <a:rPr sz="1300" b="0" dirty="0">
+                <a:solidFill>
+                  <a:srgbClr val="E2E8F0"/>
+                </a:solidFill>
+                <a:latin typeface="Consolas"/>
+              </a:rPr>
+              <a:t>,</a:t>
             </a:r>
           </a:p>
           <a:p>
@@ -15048,13 +15258,67 @@
               </a:spcAft>
             </a:pPr>
             <a:r>
-              <a:rPr sz="1300" b="0">
-                <a:solidFill>
-                  <a:srgbClr val="E2E8F0"/>
-                </a:solidFill>
-                <a:latin typeface="Consolas"/>
-              </a:rPr>
-              <a:t>       SUM(td.hind * tr.kogus * (1 - tr.allahindlus_pct / 100.0))</a:t>
+              <a:rPr sz="1300" b="0" dirty="0">
+                <a:solidFill>
+                  <a:srgbClr val="E2E8F0"/>
+                </a:solidFill>
+                <a:latin typeface="Consolas"/>
+              </a:rPr>
+              <a:t>       SUM(</a:t>
+            </a:r>
+            <a:r>
+              <a:rPr sz="1300" b="0" dirty="0" err="1">
+                <a:solidFill>
+                  <a:srgbClr val="E2E8F0"/>
+                </a:solidFill>
+                <a:latin typeface="Consolas"/>
+              </a:rPr>
+              <a:t>td.hind</a:t>
+            </a:r>
+            <a:r>
+              <a:rPr sz="1300" b="0" dirty="0">
+                <a:solidFill>
+                  <a:srgbClr val="E2E8F0"/>
+                </a:solidFill>
+                <a:latin typeface="Consolas"/>
+              </a:rPr>
+              <a:t> * </a:t>
+            </a:r>
+            <a:r>
+              <a:rPr sz="1300" b="0" dirty="0" err="1">
+                <a:solidFill>
+                  <a:srgbClr val="E2E8F0"/>
+                </a:solidFill>
+                <a:latin typeface="Consolas"/>
+              </a:rPr>
+              <a:t>tr.kogus</a:t>
+            </a:r>
+            <a:r>
+              <a:rPr sz="1300" b="0" dirty="0">
+                <a:solidFill>
+                  <a:srgbClr val="E2E8F0"/>
+                </a:solidFill>
+                <a:latin typeface="Consolas"/>
+              </a:rPr>
+              <a:t> * (1 - </a:t>
+            </a:r>
+            <a:r>
+              <a:rPr sz="1300" b="0" dirty="0" err="1">
+                <a:solidFill>
+                  <a:srgbClr val="E2E8F0"/>
+                </a:solidFill>
+                <a:latin typeface="Consolas"/>
+              </a:rPr>
+              <a:t>tr.allahindlus_pct</a:t>
+            </a:r>
+            <a:r>
+              <a:rPr sz="1300" b="0" dirty="0">
+                <a:solidFill>
+                  <a:srgbClr val="E2E8F0"/>
+                </a:solidFill>
+                <a:latin typeface="Consolas"/>
+              </a:rPr>
+              <a:t> / 100.0))</a:t>
             </a:r>
           </a:p>
           <a:p>
@@ -15064,14 +15328,29 @@
               </a:spcAft>
             </a:pPr>
             <a:r>
-              <a:rPr sz="1300" b="0">
-                <a:solidFill>
-                  <a:srgbClr val="E2E8F0"/>
-                </a:solidFill>
-                <a:latin typeface="Consolas"/>
-              </a:rPr>
-              <a:t>           AS reaalselt_makstud</a:t>
-            </a:r>
+              <a:rPr sz="1300" b="0" dirty="0">
+                <a:solidFill>
+                  <a:srgbClr val="E2E8F0"/>
+                </a:solidFill>
+                <a:latin typeface="Consolas"/>
+              </a:rPr>
+              <a:t>           AS </a:t>
+            </a:r>
+            <a:r>
+              <a:rPr sz="1300" b="0" dirty="0" err="1">
+                <a:solidFill>
+                  <a:srgbClr val="E2E8F0"/>
+                </a:solidFill>
+                <a:latin typeface="Consolas"/>
+              </a:rPr>
+              <a:t>reaalselt_makstud</a:t>
+            </a:r>
+            <a:endParaRPr sz="1300" b="0" dirty="0">
+              <a:solidFill>
+                <a:srgbClr val="E2E8F0"/>
+              </a:solidFill>
+              <a:latin typeface="Consolas"/>
+            </a:endParaRPr>
           </a:p>
           <a:p>
             <a:pPr>
@@ -15080,13 +15359,31 @@
               </a:spcAft>
             </a:pPr>
             <a:r>
-              <a:rPr sz="1300" b="0">
-                <a:solidFill>
-                  <a:srgbClr val="E2E8F0"/>
-                </a:solidFill>
-                <a:latin typeface="Consolas"/>
-              </a:rPr>
-              <a:t>FROM kliendid k</a:t>
+              <a:rPr sz="1300" b="0" dirty="0">
+                <a:solidFill>
+                  <a:srgbClr val="E2E8F0"/>
+                </a:solidFill>
+                <a:latin typeface="Consolas"/>
+              </a:rPr>
+              <a:t>FROM </a:t>
+            </a:r>
+            <a:r>
+              <a:rPr sz="1300" b="0" dirty="0" err="1">
+                <a:solidFill>
+                  <a:srgbClr val="E2E8F0"/>
+                </a:solidFill>
+                <a:latin typeface="Consolas"/>
+              </a:rPr>
+              <a:t>kliendid</a:t>
+            </a:r>
+            <a:r>
+              <a:rPr sz="1300" b="0" dirty="0">
+                <a:solidFill>
+                  <a:srgbClr val="E2E8F0"/>
+                </a:solidFill>
+                <a:latin typeface="Consolas"/>
+              </a:rPr>
+              <a:t> k</a:t>
             </a:r>
           </a:p>
           <a:p>
@@ -15096,14 +15393,65 @@
               </a:spcAft>
             </a:pPr>
             <a:r>
-              <a:rPr sz="1300" b="0">
-                <a:solidFill>
-                  <a:srgbClr val="E2E8F0"/>
-                </a:solidFill>
-                <a:latin typeface="Consolas"/>
-              </a:rPr>
-              <a:t>INNER JOIN tellimused t ON k.klient_id = t.klient_id</a:t>
-            </a:r>
+              <a:rPr sz="1300" b="0" dirty="0">
+                <a:solidFill>
+                  <a:srgbClr val="E2E8F0"/>
+                </a:solidFill>
+                <a:latin typeface="Consolas"/>
+              </a:rPr>
+              <a:t>INNER JOIN </a:t>
+            </a:r>
+            <a:r>
+              <a:rPr sz="1300" b="0" dirty="0" err="1">
+                <a:solidFill>
+                  <a:srgbClr val="E2E8F0"/>
+                </a:solidFill>
+                <a:latin typeface="Consolas"/>
+              </a:rPr>
+              <a:t>tellimused</a:t>
+            </a:r>
+            <a:r>
+              <a:rPr sz="1300" b="0" dirty="0">
+                <a:solidFill>
+                  <a:srgbClr val="E2E8F0"/>
+                </a:solidFill>
+                <a:latin typeface="Consolas"/>
+              </a:rPr>
+              <a:t> t ON </a:t>
+            </a:r>
+            <a:r>
+              <a:rPr sz="1300" b="0" dirty="0" err="1">
+                <a:solidFill>
+                  <a:srgbClr val="E2E8F0"/>
+                </a:solidFill>
+                <a:latin typeface="Consolas"/>
+              </a:rPr>
+              <a:t>k.klient_id</a:t>
+            </a:r>
+            <a:r>
+              <a:rPr sz="1300" b="0" dirty="0">
+                <a:solidFill>
+                  <a:srgbClr val="E2E8F0"/>
+                </a:solidFill>
+                <a:latin typeface="Consolas"/>
+              </a:rPr>
+              <a:t> = </a:t>
+            </a:r>
+            <a:r>
+              <a:rPr sz="1300" b="0" dirty="0" err="1">
+                <a:solidFill>
+                  <a:srgbClr val="E2E8F0"/>
+                </a:solidFill>
+                <a:latin typeface="Consolas"/>
+              </a:rPr>
+              <a:t>t.klient_id</a:t>
+            </a:r>
+            <a:endParaRPr sz="1300" b="0" dirty="0">
+              <a:solidFill>
+                <a:srgbClr val="E2E8F0"/>
+              </a:solidFill>
+              <a:latin typeface="Consolas"/>
+            </a:endParaRPr>
           </a:p>
           <a:p>
             <a:pPr>
@@ -15112,14 +15460,65 @@
               </a:spcAft>
             </a:pPr>
             <a:r>
-              <a:rPr sz="1300" b="0">
-                <a:solidFill>
-                  <a:srgbClr val="E2E8F0"/>
-                </a:solidFill>
-                <a:latin typeface="Consolas"/>
-              </a:rPr>
-              <a:t>INNER JOIN tellimuse_read tr ON t.tellimus_id = tr.tellimus_id</a:t>
-            </a:r>
+              <a:rPr sz="1300" b="0" dirty="0">
+                <a:solidFill>
+                  <a:srgbClr val="E2E8F0"/>
+                </a:solidFill>
+                <a:latin typeface="Consolas"/>
+              </a:rPr>
+              <a:t>INNER JOIN </a:t>
+            </a:r>
+            <a:r>
+              <a:rPr sz="1300" b="0" dirty="0" err="1">
+                <a:solidFill>
+                  <a:srgbClr val="E2E8F0"/>
+                </a:solidFill>
+                <a:latin typeface="Consolas"/>
+              </a:rPr>
+              <a:t>tellimuse_read</a:t>
+            </a:r>
+            <a:r>
+              <a:rPr sz="1300" b="0" dirty="0">
+                <a:solidFill>
+                  <a:srgbClr val="E2E8F0"/>
+                </a:solidFill>
+                <a:latin typeface="Consolas"/>
+              </a:rPr>
+              <a:t> tr ON </a:t>
+            </a:r>
+            <a:r>
+              <a:rPr sz="1300" b="0" dirty="0" err="1">
+                <a:solidFill>
+                  <a:srgbClr val="E2E8F0"/>
+                </a:solidFill>
+                <a:latin typeface="Consolas"/>
+              </a:rPr>
+              <a:t>t.tellimus_id</a:t>
+            </a:r>
+            <a:r>
+              <a:rPr sz="1300" b="0" dirty="0">
+                <a:solidFill>
+                  <a:srgbClr val="E2E8F0"/>
+                </a:solidFill>
+                <a:latin typeface="Consolas"/>
+              </a:rPr>
+              <a:t> = </a:t>
+            </a:r>
+            <a:r>
+              <a:rPr sz="1300" b="0" dirty="0" err="1">
+                <a:solidFill>
+                  <a:srgbClr val="E2E8F0"/>
+                </a:solidFill>
+                <a:latin typeface="Consolas"/>
+              </a:rPr>
+              <a:t>tr.tellimus_id</a:t>
+            </a:r>
+            <a:endParaRPr sz="1300" b="0" dirty="0">
+              <a:solidFill>
+                <a:srgbClr val="E2E8F0"/>
+              </a:solidFill>
+              <a:latin typeface="Consolas"/>
+            </a:endParaRPr>
           </a:p>
           <a:p>
             <a:pPr>
@@ -15128,14 +15527,47 @@
               </a:spcAft>
             </a:pPr>
             <a:r>
-              <a:rPr sz="1300" b="0">
-                <a:solidFill>
-                  <a:srgbClr val="E2E8F0"/>
-                </a:solidFill>
-                <a:latin typeface="Consolas"/>
-              </a:rPr>
-              <a:t>INNER JOIN tooted td ON tr.toode_id = td.toode_id</a:t>
-            </a:r>
+              <a:rPr sz="1300" b="0" dirty="0">
+                <a:solidFill>
+                  <a:srgbClr val="E2E8F0"/>
+                </a:solidFill>
+                <a:latin typeface="Consolas"/>
+              </a:rPr>
+              <a:t>INNER JOIN tooted td ON </a:t>
+            </a:r>
+            <a:r>
+              <a:rPr sz="1300" b="0" dirty="0" err="1">
+                <a:solidFill>
+                  <a:srgbClr val="E2E8F0"/>
+                </a:solidFill>
+                <a:latin typeface="Consolas"/>
+              </a:rPr>
+              <a:t>tr.toode_id</a:t>
+            </a:r>
+            <a:r>
+              <a:rPr sz="1300" b="0" dirty="0">
+                <a:solidFill>
+                  <a:srgbClr val="E2E8F0"/>
+                </a:solidFill>
+                <a:latin typeface="Consolas"/>
+              </a:rPr>
+              <a:t> = </a:t>
+            </a:r>
+            <a:r>
+              <a:rPr sz="1300" b="0" dirty="0" err="1">
+                <a:solidFill>
+                  <a:srgbClr val="E2E8F0"/>
+                </a:solidFill>
+                <a:latin typeface="Consolas"/>
+              </a:rPr>
+              <a:t>td.toode_id</a:t>
+            </a:r>
+            <a:endParaRPr sz="1300" b="0" dirty="0">
+              <a:solidFill>
+                <a:srgbClr val="E2E8F0"/>
+              </a:solidFill>
+              <a:latin typeface="Consolas"/>
+            </a:endParaRPr>
           </a:p>
           <a:p>
             <a:pPr>
@@ -15144,13 +15576,49 @@
               </a:spcAft>
             </a:pPr>
             <a:r>
-              <a:rPr sz="1300" b="0">
-                <a:solidFill>
-                  <a:srgbClr val="E2E8F0"/>
-                </a:solidFill>
-                <a:latin typeface="Consolas"/>
-              </a:rPr>
-              <a:t>WHERE t.staatus = 'Täidetud'</a:t>
+              <a:rPr sz="1300" b="0" dirty="0">
+                <a:solidFill>
+                  <a:srgbClr val="E2E8F0"/>
+                </a:solidFill>
+                <a:latin typeface="Consolas"/>
+              </a:rPr>
+              <a:t>WHERE </a:t>
+            </a:r>
+            <a:r>
+              <a:rPr sz="1300" b="0" dirty="0" err="1">
+                <a:solidFill>
+                  <a:srgbClr val="E2E8F0"/>
+                </a:solidFill>
+                <a:latin typeface="Consolas"/>
+              </a:rPr>
+              <a:t>t.staatus</a:t>
+            </a:r>
+            <a:r>
+              <a:rPr sz="1300" b="0" dirty="0">
+                <a:solidFill>
+                  <a:srgbClr val="E2E8F0"/>
+                </a:solidFill>
+                <a:latin typeface="Consolas"/>
+              </a:rPr>
+              <a:t> = '</a:t>
+            </a:r>
+            <a:r>
+              <a:rPr sz="1300" b="0" dirty="0" err="1">
+                <a:solidFill>
+                  <a:srgbClr val="E2E8F0"/>
+                </a:solidFill>
+                <a:latin typeface="Consolas"/>
+              </a:rPr>
+              <a:t>Täidetud</a:t>
+            </a:r>
+            <a:r>
+              <a:rPr sz="1300" b="0" dirty="0">
+                <a:solidFill>
+                  <a:srgbClr val="E2E8F0"/>
+                </a:solidFill>
+                <a:latin typeface="Consolas"/>
+              </a:rPr>
+              <a:t>'</a:t>
             </a:r>
           </a:p>
           <a:p>
@@ -15160,14 +15628,29 @@
               </a:spcAft>
             </a:pPr>
             <a:r>
-              <a:rPr sz="1300" b="0">
-                <a:solidFill>
-                  <a:srgbClr val="E2E8F0"/>
-                </a:solidFill>
-                <a:latin typeface="Consolas"/>
-              </a:rPr>
-              <a:t>GROUP BY k.nimi</a:t>
-            </a:r>
+              <a:rPr sz="1300" b="0" dirty="0">
+                <a:solidFill>
+                  <a:srgbClr val="E2E8F0"/>
+                </a:solidFill>
+                <a:latin typeface="Consolas"/>
+              </a:rPr>
+              <a:t>GROUP BY </a:t>
+            </a:r>
+            <a:r>
+              <a:rPr sz="1300" b="0" dirty="0" err="1">
+                <a:solidFill>
+                  <a:srgbClr val="E2E8F0"/>
+                </a:solidFill>
+                <a:latin typeface="Consolas"/>
+              </a:rPr>
+              <a:t>k.nimi</a:t>
+            </a:r>
+            <a:endParaRPr sz="1300" b="0" dirty="0">
+              <a:solidFill>
+                <a:srgbClr val="E2E8F0"/>
+              </a:solidFill>
+              <a:latin typeface="Consolas"/>
+            </a:endParaRPr>
           </a:p>
           <a:p>
             <a:pPr>
@@ -15176,13 +15659,31 @@
               </a:spcAft>
             </a:pPr>
             <a:r>
-              <a:rPr sz="1300" b="0">
-                <a:solidFill>
-                  <a:srgbClr val="E2E8F0"/>
-                </a:solidFill>
-                <a:latin typeface="Consolas"/>
-              </a:rPr>
-              <a:t>ORDER BY reaalselt_makstud DESC;</a:t>
+              <a:rPr sz="1300" b="0" dirty="0">
+                <a:solidFill>
+                  <a:srgbClr val="E2E8F0"/>
+                </a:solidFill>
+                <a:latin typeface="Consolas"/>
+              </a:rPr>
+              <a:t>ORDER BY </a:t>
+            </a:r>
+            <a:r>
+              <a:rPr sz="1300" b="0" dirty="0" err="1">
+                <a:solidFill>
+                  <a:srgbClr val="E2E8F0"/>
+                </a:solidFill>
+                <a:latin typeface="Consolas"/>
+              </a:rPr>
+              <a:t>reaalselt_makstud</a:t>
+            </a:r>
+            <a:r>
+              <a:rPr sz="1300" b="0" dirty="0">
+                <a:solidFill>
+                  <a:srgbClr val="E2E8F0"/>
+                </a:solidFill>
+                <a:latin typeface="Consolas"/>
+              </a:rPr>
+              <a:t> DESC;</a:t>
             </a:r>
           </a:p>
         </p:txBody>
@@ -20485,7 +20986,7 @@
         </p:nvSpPr>
         <p:spPr>
           <a:xfrm>
-            <a:off x="365760" y="1874519"/>
+            <a:off x="396240" y="1883664"/>
             <a:ext cx="11430000" cy="2926080"/>
           </a:xfrm>
           <a:prstGeom prst="roundRect">
@@ -22363,86 +22864,6 @@
       </p:sp>
       <p:sp>
         <p:nvSpPr>
-          <p:cNvPr id="7" name="Rectangle 6"/>
-          <p:cNvSpPr/>
-          <p:nvPr/>
-        </p:nvSpPr>
-        <p:spPr>
-          <a:xfrm>
-            <a:off x="0" y="6601968"/>
-            <a:ext cx="12191695" cy="256032"/>
-          </a:xfrm>
-          <a:prstGeom prst="rect">
-            <a:avLst/>
-          </a:prstGeom>
-          <a:solidFill>
-            <a:srgbClr val="0F203E"/>
-          </a:solidFill>
-          <a:ln>
-            <a:noFill/>
-          </a:ln>
-          <a:effectLst/>
-        </p:spPr>
-        <p:style>
-          <a:lnRef idx="1">
-            <a:schemeClr val="accent1"/>
-          </a:lnRef>
-          <a:fillRef idx="3">
-            <a:schemeClr val="accent1"/>
-          </a:fillRef>
-          <a:effectRef idx="2">
-            <a:schemeClr val="accent1"/>
-          </a:effectRef>
-          <a:fontRef idx="minor">
-            <a:schemeClr val="lt1"/>
-          </a:fontRef>
-        </p:style>
-        <p:txBody>
-          <a:bodyPr rtlCol="0" anchor="ctr"/>
-          <a:lstStyle/>
-          <a:p>
-            <a:pPr algn="ctr"/>
-            <a:endParaRPr/>
-          </a:p>
-        </p:txBody>
-      </p:sp>
-      <p:sp>
-        <p:nvSpPr>
-          <p:cNvPr id="8" name="TextBox 7"/>
-          <p:cNvSpPr txBox="1"/>
-          <p:nvPr/>
-        </p:nvSpPr>
-        <p:spPr>
-          <a:xfrm>
-            <a:off x="365760" y="6601968"/>
-            <a:ext cx="8229600" cy="256032"/>
-          </a:xfrm>
-          <a:prstGeom prst="rect">
-            <a:avLst/>
-          </a:prstGeom>
-          <a:noFill/>
-        </p:spPr>
-        <p:txBody>
-          <a:bodyPr wrap="square" anchor="ctr">
-            <a:spAutoFit/>
-          </a:bodyPr>
-          <a:lstStyle/>
-          <a:p>
-            <a:pPr algn="l"/>
-            <a:r>
-              <a:rPr sz="1100" b="0">
-                <a:solidFill>
-                  <a:srgbClr val="94A3B8"/>
-                </a:solidFill>
-                <a:latin typeface="Calibri"/>
-              </a:rPr>
-              <a:t>SQL koolitus  ·  2. päev · plokk 5</a:t>
-            </a:r>
-          </a:p>
-        </p:txBody>
-      </p:sp>
-      <p:sp>
-        <p:nvSpPr>
           <p:cNvPr id="9" name="TextBox 8"/>
           <p:cNvSpPr txBox="1"/>
           <p:nvPr/>
@@ -27606,7 +28027,7 @@
         <p:spPr>
           <a:xfrm>
             <a:off x="621792" y="1618488"/>
-            <a:ext cx="5257800" cy="4434840"/>
+            <a:ext cx="5257800" cy="1528624"/>
           </a:xfrm>
           <a:prstGeom prst="rect">
             <a:avLst/>
@@ -27625,13 +28046,58 @@
               </a:spcAft>
             </a:pPr>
             <a:r>
-              <a:rPr sz="1600" b="0">
-                <a:solidFill>
-                  <a:srgbClr val="334155"/>
-                </a:solidFill>
-                <a:latin typeface="Calibri"/>
-              </a:rPr>
-              <a:t>tellimused näitab klient_id = 7.</a:t>
+              <a:rPr sz="1600" b="0" dirty="0" err="1">
+                <a:solidFill>
+                  <a:srgbClr val="334155"/>
+                </a:solidFill>
+                <a:latin typeface="Calibri"/>
+              </a:rPr>
+              <a:t>tellimused</a:t>
+            </a:r>
+            <a:r>
+              <a:rPr sz="1600" b="0" dirty="0">
+                <a:solidFill>
+                  <a:srgbClr val="334155"/>
+                </a:solidFill>
+                <a:latin typeface="Calibri"/>
+              </a:rPr>
+              <a:t> </a:t>
+            </a:r>
+            <a:r>
+              <a:rPr sz="1600" b="0" dirty="0" err="1">
+                <a:solidFill>
+                  <a:srgbClr val="334155"/>
+                </a:solidFill>
+                <a:latin typeface="Calibri"/>
+              </a:rPr>
+              <a:t>näitab</a:t>
+            </a:r>
+            <a:r>
+              <a:rPr sz="1600" b="0" dirty="0">
+                <a:solidFill>
+                  <a:srgbClr val="334155"/>
+                </a:solidFill>
+                <a:latin typeface="Calibri"/>
+              </a:rPr>
+              <a:t> </a:t>
+            </a:r>
+            <a:r>
+              <a:rPr sz="1600" b="0" dirty="0" err="1">
+                <a:solidFill>
+                  <a:srgbClr val="334155"/>
+                </a:solidFill>
+                <a:latin typeface="Calibri"/>
+              </a:rPr>
+              <a:t>klient_id</a:t>
+            </a:r>
+            <a:r>
+              <a:rPr sz="1600" b="0" dirty="0">
+                <a:solidFill>
+                  <a:srgbClr val="334155"/>
+                </a:solidFill>
+                <a:latin typeface="Calibri"/>
+              </a:rPr>
+              <a:t> = 7.</a:t>
             </a:r>
           </a:p>
           <a:p>
@@ -27641,14 +28107,56 @@
               </a:spcAft>
             </a:pPr>
             <a:r>
-              <a:rPr sz="1600" b="0">
-                <a:solidFill>
-                  <a:srgbClr val="334155"/>
-                </a:solidFill>
-                <a:latin typeface="Calibri"/>
-              </a:rPr>
-              <a:t>Sa ei näe, et see on Mari Kask.</a:t>
-            </a:r>
+              <a:rPr sz="1600" b="0" dirty="0">
+                <a:solidFill>
+                  <a:srgbClr val="334155"/>
+                </a:solidFill>
+                <a:latin typeface="Calibri"/>
+              </a:rPr>
+              <a:t>Sa </a:t>
+            </a:r>
+            <a:r>
+              <a:rPr sz="1600" b="0" dirty="0" err="1">
+                <a:solidFill>
+                  <a:srgbClr val="334155"/>
+                </a:solidFill>
+                <a:latin typeface="Calibri"/>
+              </a:rPr>
+              <a:t>ei</a:t>
+            </a:r>
+            <a:r>
+              <a:rPr sz="1600" b="0" dirty="0">
+                <a:solidFill>
+                  <a:srgbClr val="334155"/>
+                </a:solidFill>
+                <a:latin typeface="Calibri"/>
+              </a:rPr>
+              <a:t> </a:t>
+            </a:r>
+            <a:r>
+              <a:rPr sz="1600" b="0" dirty="0" err="1">
+                <a:solidFill>
+                  <a:srgbClr val="334155"/>
+                </a:solidFill>
+                <a:latin typeface="Calibri"/>
+              </a:rPr>
+              <a:t>näe</a:t>
+            </a:r>
+            <a:r>
+              <a:rPr sz="1600" b="0" dirty="0">
+                <a:solidFill>
+                  <a:srgbClr val="334155"/>
+                </a:solidFill>
+                <a:latin typeface="Calibri"/>
+              </a:rPr>
+              <a:t>, et see on Mari Kask.</a:t>
+            </a:r>
+            <a:endParaRPr lang="en-GB" sz="1600" b="0" dirty="0">
+              <a:solidFill>
+                <a:srgbClr val="334155"/>
+              </a:solidFill>
+              <a:latin typeface="Calibri"/>
+            </a:endParaRPr>
           </a:p>
           <a:p>
             <a:pPr>
@@ -27656,15 +28164,12 @@
                 <a:spcPts val="400"/>
               </a:spcAft>
             </a:pPr>
-            <a:r>
-              <a:rPr sz="1600" b="0">
-                <a:solidFill>
-                  <a:srgbClr val="334155"/>
-                </a:solidFill>
-                <a:latin typeface="Calibri"/>
-              </a:rPr>
-              <a:t>tellimuse_read näitab toode_id = 104.</a:t>
-            </a:r>
+            <a:endParaRPr sz="1600" b="0" dirty="0">
+              <a:solidFill>
+                <a:srgbClr val="334155"/>
+              </a:solidFill>
+              <a:latin typeface="Calibri"/>
+            </a:endParaRPr>
           </a:p>
           <a:p>
             <a:pPr>
@@ -27673,13 +28178,110 @@
               </a:spcAft>
             </a:pPr>
             <a:r>
-              <a:rPr sz="1600" b="0">
-                <a:solidFill>
-                  <a:srgbClr val="334155"/>
-                </a:solidFill>
-                <a:latin typeface="Calibri"/>
-              </a:rPr>
-              <a:t>Sa ei näe, et see on Galaxy S24.</a:t>
+              <a:rPr sz="1600" b="0" dirty="0" err="1">
+                <a:solidFill>
+                  <a:srgbClr val="334155"/>
+                </a:solidFill>
+                <a:latin typeface="Calibri"/>
+              </a:rPr>
+              <a:t>tellimuse_read</a:t>
+            </a:r>
+            <a:r>
+              <a:rPr sz="1600" b="0" dirty="0">
+                <a:solidFill>
+                  <a:srgbClr val="334155"/>
+                </a:solidFill>
+                <a:latin typeface="Calibri"/>
+              </a:rPr>
+              <a:t> </a:t>
+            </a:r>
+            <a:r>
+              <a:rPr sz="1600" b="0" dirty="0" err="1">
+                <a:solidFill>
+                  <a:srgbClr val="334155"/>
+                </a:solidFill>
+                <a:latin typeface="Calibri"/>
+              </a:rPr>
+              <a:t>näitab</a:t>
+            </a:r>
+            <a:r>
+              <a:rPr sz="1600" b="0" dirty="0">
+                <a:solidFill>
+                  <a:srgbClr val="334155"/>
+                </a:solidFill>
+                <a:latin typeface="Calibri"/>
+              </a:rPr>
+              <a:t> </a:t>
+            </a:r>
+            <a:r>
+              <a:rPr sz="1600" b="0" dirty="0" err="1">
+                <a:solidFill>
+                  <a:srgbClr val="334155"/>
+                </a:solidFill>
+                <a:latin typeface="Calibri"/>
+              </a:rPr>
+              <a:t>toode_id</a:t>
+            </a:r>
+            <a:r>
+              <a:rPr sz="1600" b="0" dirty="0">
+                <a:solidFill>
+                  <a:srgbClr val="334155"/>
+                </a:solidFill>
+                <a:latin typeface="Calibri"/>
+              </a:rPr>
+              <a:t> = 104.</a:t>
+            </a:r>
+          </a:p>
+          <a:p>
+            <a:pPr>
+              <a:spcAft>
+                <a:spcPts val="400"/>
+              </a:spcAft>
+            </a:pPr>
+            <a:r>
+              <a:rPr sz="1600" b="0" dirty="0">
+                <a:solidFill>
+                  <a:srgbClr val="334155"/>
+                </a:solidFill>
+                <a:latin typeface="Calibri"/>
+              </a:rPr>
+              <a:t>Sa </a:t>
+            </a:r>
+            <a:r>
+              <a:rPr sz="1600" b="0" dirty="0" err="1">
+                <a:solidFill>
+                  <a:srgbClr val="334155"/>
+                </a:solidFill>
+                <a:latin typeface="Calibri"/>
+              </a:rPr>
+              <a:t>ei</a:t>
+            </a:r>
+            <a:r>
+              <a:rPr sz="1600" b="0" dirty="0">
+                <a:solidFill>
+                  <a:srgbClr val="334155"/>
+                </a:solidFill>
+                <a:latin typeface="Calibri"/>
+              </a:rPr>
+              <a:t> </a:t>
+            </a:r>
+            <a:r>
+              <a:rPr sz="1600" b="0" dirty="0" err="1">
+                <a:solidFill>
+                  <a:srgbClr val="334155"/>
+                </a:solidFill>
+                <a:latin typeface="Calibri"/>
+              </a:rPr>
+              <a:t>näe</a:t>
+            </a:r>
+            <a:r>
+              <a:rPr sz="1600" b="0" dirty="0">
+                <a:solidFill>
+                  <a:srgbClr val="334155"/>
+                </a:solidFill>
+                <a:latin typeface="Calibri"/>
+              </a:rPr>
+              <a:t>, et see on Galaxy S24.</a:t>
             </a:r>
           </a:p>
         </p:txBody>
@@ -27839,13 +28441,85 @@
               </a:spcAft>
             </a:pPr>
             <a:r>
-              <a:rPr sz="1600" b="0" dirty="0" err="1">
-                <a:solidFill>
-                  <a:srgbClr val="334155"/>
-                </a:solidFill>
-                <a:latin typeface="Calibri"/>
-              </a:rPr>
-              <a:t>Tellimuse</a:t>
+              <a:rPr lang="en-GB" sz="1600" b="0" dirty="0" err="1">
+                <a:solidFill>
+                  <a:srgbClr val="334155"/>
+                </a:solidFill>
+                <a:latin typeface="Calibri"/>
+              </a:rPr>
+              <a:t>Klient_id</a:t>
+            </a:r>
+            <a:r>
+              <a:rPr lang="en-GB" sz="1600" b="0" dirty="0">
+                <a:solidFill>
+                  <a:srgbClr val="334155"/>
+                </a:solidFill>
+                <a:latin typeface="Calibri"/>
+              </a:rPr>
+              <a:t> </a:t>
+            </a:r>
+            <a:r>
+              <a:rPr lang="en-GB" sz="1600" b="0" dirty="0" err="1">
+                <a:solidFill>
+                  <a:srgbClr val="334155"/>
+                </a:solidFill>
+                <a:latin typeface="Calibri"/>
+              </a:rPr>
+              <a:t>alusel</a:t>
+            </a:r>
+            <a:r>
+              <a:rPr lang="en-GB" sz="1600" b="0" dirty="0">
+                <a:solidFill>
+                  <a:srgbClr val="334155"/>
+                </a:solidFill>
+                <a:latin typeface="Calibri"/>
+              </a:rPr>
+              <a:t> </a:t>
+            </a:r>
+            <a:r>
+              <a:rPr lang="en-GB" sz="1600" b="0" dirty="0" err="1">
+                <a:solidFill>
+                  <a:srgbClr val="334155"/>
+                </a:solidFill>
+                <a:latin typeface="Calibri"/>
+              </a:rPr>
+              <a:t>teisest</a:t>
+            </a:r>
+            <a:r>
+              <a:rPr lang="en-GB" sz="1600" b="0" dirty="0">
+                <a:solidFill>
+                  <a:srgbClr val="334155"/>
+                </a:solidFill>
+                <a:latin typeface="Calibri"/>
+              </a:rPr>
+              <a:t> </a:t>
+            </a:r>
+            <a:r>
+              <a:rPr lang="en-GB" sz="1600" b="0" dirty="0" err="1">
+                <a:solidFill>
+                  <a:srgbClr val="334155"/>
+                </a:solidFill>
+                <a:latin typeface="Calibri"/>
+              </a:rPr>
+              <a:t>tabelist</a:t>
+            </a:r>
+            <a:r>
+              <a:rPr lang="en-GB" sz="1600" b="0" dirty="0">
+                <a:solidFill>
+                  <a:srgbClr val="334155"/>
+                </a:solidFill>
+                <a:latin typeface="Calibri"/>
+              </a:rPr>
+              <a:t>  </a:t>
+            </a:r>
+            <a:r>
+              <a:rPr lang="en-GB" sz="1600" dirty="0">
+                <a:solidFill>
+                  <a:srgbClr val="334155"/>
+                </a:solidFill>
+                <a:latin typeface="Calibri"/>
+              </a:rPr>
+              <a:t>-&gt; </a:t>
             </a:r>
             <a:r>
               <a:rPr sz="1600" b="0" dirty="0">
@@ -27854,25 +28528,7 @@
                 </a:solidFill>
                 <a:latin typeface="Calibri"/>
               </a:rPr>
-              <a:t> ID + </a:t>
-            </a:r>
-            <a:r>
-              <a:rPr sz="1600" b="0" dirty="0" err="1">
-                <a:solidFill>
-                  <a:srgbClr val="334155"/>
-                </a:solidFill>
-                <a:latin typeface="Calibri"/>
-              </a:rPr>
-              <a:t>kuupäev</a:t>
-            </a:r>
-            <a:r>
-              <a:rPr sz="1600" b="0" dirty="0">
-                <a:solidFill>
-                  <a:srgbClr val="334155"/>
-                </a:solidFill>
-                <a:latin typeface="Calibri"/>
-              </a:rPr>
-              <a:t> + </a:t>
+              <a:t> </a:t>
             </a:r>
             <a:r>
               <a:rPr sz="1600" b="1" dirty="0">
@@ -27904,25 +28560,16 @@
               </a:spcAft>
             </a:pPr>
             <a:r>
-              <a:rPr sz="1600" b="1" dirty="0">
-                <a:solidFill>
-                  <a:srgbClr val="334155"/>
-                </a:solidFill>
-                <a:latin typeface="Calibri"/>
-              </a:rPr>
-              <a:t>Toote </a:t>
-            </a:r>
-            <a:r>
-              <a:rPr sz="1600" b="1" dirty="0" err="1">
-                <a:solidFill>
-                  <a:srgbClr val="334155"/>
-                </a:solidFill>
-                <a:latin typeface="Calibri"/>
-              </a:rPr>
-              <a:t>nimetus</a:t>
-            </a:r>
-            <a:r>
-              <a:rPr sz="1600" b="1" dirty="0">
+              <a:rPr lang="en-GB" sz="1600" dirty="0" err="1">
+                <a:solidFill>
+                  <a:srgbClr val="334155"/>
+                </a:solidFill>
+                <a:latin typeface="Calibri"/>
+              </a:rPr>
+              <a:t>Toode_id</a:t>
+            </a:r>
+            <a:r>
+              <a:rPr lang="en-GB" sz="1600" dirty="0">
                 <a:solidFill>
                   <a:srgbClr val="334155"/>
                 </a:solidFill>
@@ -27931,33 +28578,76 @@
               <a:t> </a:t>
             </a:r>
             <a:r>
-              <a:rPr sz="1600" b="0" dirty="0">
-                <a:solidFill>
-                  <a:srgbClr val="334155"/>
-                </a:solidFill>
-                <a:latin typeface="Calibri"/>
-              </a:rPr>
-              <a:t>+ </a:t>
-            </a:r>
-            <a:r>
-              <a:rPr sz="1600" b="0" dirty="0" err="1">
-                <a:solidFill>
-                  <a:srgbClr val="334155"/>
-                </a:solidFill>
-                <a:latin typeface="Calibri"/>
-              </a:rPr>
-              <a:t>osakond</a:t>
-            </a:r>
-            <a:r>
-              <a:rPr sz="1600" b="0" dirty="0">
-                <a:solidFill>
-                  <a:srgbClr val="334155"/>
-                </a:solidFill>
-                <a:latin typeface="Calibri"/>
-              </a:rPr>
-              <a:t> + KM.</a:t>
-            </a:r>
-            <a:endParaRPr lang="en-GB" sz="1600" b="0" dirty="0">
+              <a:rPr lang="en-GB" sz="1600" dirty="0" err="1">
+                <a:solidFill>
+                  <a:srgbClr val="334155"/>
+                </a:solidFill>
+                <a:latin typeface="Calibri"/>
+              </a:rPr>
+              <a:t>alusel</a:t>
+            </a:r>
+            <a:r>
+              <a:rPr lang="en-GB" sz="1600" dirty="0">
+                <a:solidFill>
+                  <a:srgbClr val="334155"/>
+                </a:solidFill>
+                <a:latin typeface="Calibri"/>
+              </a:rPr>
+              <a:t> </a:t>
+            </a:r>
+            <a:r>
+              <a:rPr lang="en-GB" sz="1600" dirty="0" err="1">
+                <a:solidFill>
+                  <a:srgbClr val="334155"/>
+                </a:solidFill>
+                <a:latin typeface="Calibri"/>
+              </a:rPr>
+              <a:t>teisest</a:t>
+            </a:r>
+            <a:r>
+              <a:rPr lang="en-GB" sz="1600" dirty="0">
+                <a:solidFill>
+                  <a:srgbClr val="334155"/>
+                </a:solidFill>
+                <a:latin typeface="Calibri"/>
+              </a:rPr>
+              <a:t> </a:t>
+            </a:r>
+            <a:r>
+              <a:rPr lang="en-GB" sz="1600" dirty="0" err="1">
+                <a:solidFill>
+                  <a:srgbClr val="334155"/>
+                </a:solidFill>
+                <a:latin typeface="Calibri"/>
+              </a:rPr>
+              <a:t>tabelist</a:t>
+            </a:r>
+            <a:r>
+              <a:rPr lang="en-GB" sz="1600" dirty="0">
+                <a:solidFill>
+                  <a:srgbClr val="334155"/>
+                </a:solidFill>
+                <a:latin typeface="Calibri"/>
+              </a:rPr>
+              <a:t> -&gt; </a:t>
+            </a:r>
+            <a:r>
+              <a:rPr lang="en-GB" sz="1600" dirty="0">
+                <a:solidFill>
+                  <a:srgbClr val="334155"/>
+                </a:solidFill>
+              </a:rPr>
+              <a:t> </a:t>
+            </a:r>
+            <a:r>
+              <a:rPr lang="en-GB" sz="1600" b="1" dirty="0">
+                <a:solidFill>
+                  <a:srgbClr val="334155"/>
+                </a:solidFill>
+              </a:rPr>
+              <a:t>Galaxy S24</a:t>
+            </a:r>
+            <a:endParaRPr lang="en-GB" sz="1600" b="1" dirty="0">
               <a:solidFill>
                 <a:srgbClr val="334155"/>
               </a:solidFill>
